--- a/public/fun/cards/expert/expert-31.pptx
+++ b/public/fun/cards/expert/expert-31.pptx
@@ -3085,7 +3085,7 @@
     <p:bg>
       <p:bgPr>
         <a:solidFill>
-          <a:srgbClr val="3B6482"/>
+          <a:srgbClr val="00C2C0"/>
         </a:solidFill>
         <a:effectLst/>
       </p:bgPr>
@@ -3099,20 +3099,20 @@
       <p:grpSpPr/>
       <p:sp>
         <p:nvSpPr>
-          <p:cNvPr id="2" name="Rectangle 1"/>
+          <p:cNvPr id="2" name="Oval 1"/>
           <p:cNvSpPr/>
           <p:nvPr/>
         </p:nvSpPr>
         <p:spPr>
           <a:xfrm>
-            <a:off x="0" y="0"/>
-            <a:ext cx="165600" cy="1800000"/>
+            <a:off x="547200" y="475200"/>
+            <a:ext cx="849600" cy="849600"/>
           </a:xfrm>
-          <a:prstGeom prst="rect">
+          <a:prstGeom prst="ellipse">
             <a:avLst/>
           </a:prstGeom>
           <a:solidFill>
-            <a:srgbClr val="D3E3EE"/>
+            <a:srgbClr val="33CECD"/>
           </a:solidFill>
           <a:ln>
             <a:noFill/>
@@ -3128,20 +3128,22 @@
       </p:sp>
       <p:sp>
         <p:nvSpPr>
-          <p:cNvPr id="3" name="Rectangle 2"/>
+          <p:cNvPr id="3" name="Oval 2"/>
           <p:cNvSpPr/>
           <p:nvPr/>
         </p:nvSpPr>
         <p:spPr>
           <a:xfrm>
-            <a:off x="165600" y="0"/>
-            <a:ext cx="36000" cy="1800000"/>
+            <a:off x="187200" y="475200"/>
+            <a:ext cx="849600" cy="849600"/>
           </a:xfrm>
-          <a:prstGeom prst="rect">
+          <a:prstGeom prst="ellipse">
             <a:avLst/>
           </a:prstGeom>
           <a:solidFill>
-            <a:srgbClr val="5A7D96"/>
+            <a:srgbClr val="12151C">
+              <a:alpha val="92000"/>
+            </a:srgbClr>
           </a:solidFill>
           <a:ln>
             <a:noFill/>
@@ -3157,114 +3159,14 @@
       </p:sp>
       <p:sp>
         <p:nvSpPr>
-          <p:cNvPr id="4" name="Freeform 3"/>
-          <p:cNvSpPr/>
+          <p:cNvPr id="4" name="텍스트"/>
+          <p:cNvSpPr txBox="1"/>
           <p:nvPr/>
         </p:nvSpPr>
         <p:spPr>
           <a:xfrm>
-            <a:off x="2649024" y="281232"/>
-            <a:ext cx="152064" cy="221184"/>
-          </a:xfrm>
-          <a:custGeom>
-            <a:avLst/>
-            <a:gdLst/>
-            <a:ahLst/>
-            <a:cxnLst/>
-            <a:rect l="l" t="t" r="r" b="b"/>
-            <a:pathLst>
-              <a:path w="152064" h="221184">
-                <a:moveTo>
-                  <a:pt x="0" y="0"/>
-                </a:moveTo>
-                <a:lnTo>
-                  <a:pt x="152064" y="27648"/>
-                </a:lnTo>
-                <a:lnTo>
-                  <a:pt x="152064" y="221184"/>
-                </a:lnTo>
-                <a:lnTo>
-                  <a:pt x="0" y="193536"/>
-                </a:lnTo>
-                <a:close/>
-              </a:path>
-            </a:pathLst>
-          </a:custGeom>
-          <a:solidFill>
-            <a:srgbClr val="D3E3EE"/>
-          </a:solidFill>
-          <a:ln>
-            <a:noFill/>
-          </a:ln>
-        </p:spPr>
-        <p:txBody>
-          <a:bodyPr rtlCol="0" anchor="ctr"/>
-          <a:lstStyle/>
-          <a:p>
-            <a:pPr algn="ctr"/>
-          </a:p>
-        </p:txBody>
-      </p:sp>
-      <p:sp>
-        <p:nvSpPr>
-          <p:cNvPr id="5" name="Freeform 4"/>
-          <p:cNvSpPr/>
-          <p:nvPr/>
-        </p:nvSpPr>
-        <p:spPr>
-          <a:xfrm>
-            <a:off x="2814912" y="281232"/>
-            <a:ext cx="152064" cy="221184"/>
-          </a:xfrm>
-          <a:custGeom>
-            <a:avLst/>
-            <a:gdLst/>
-            <a:ahLst/>
-            <a:cxnLst/>
-            <a:rect l="l" t="t" r="r" b="b"/>
-            <a:pathLst>
-              <a:path w="152064" h="221184">
-                <a:moveTo>
-                  <a:pt x="152064" y="0"/>
-                </a:moveTo>
-                <a:lnTo>
-                  <a:pt x="0" y="27648"/>
-                </a:lnTo>
-                <a:lnTo>
-                  <a:pt x="0" y="221184"/>
-                </a:lnTo>
-                <a:lnTo>
-                  <a:pt x="152064" y="193536"/>
-                </a:lnTo>
-                <a:close/>
-              </a:path>
-            </a:pathLst>
-          </a:custGeom>
-          <a:solidFill>
-            <a:srgbClr val="5A7D96"/>
-          </a:solidFill>
-          <a:ln>
-            <a:noFill/>
-          </a:ln>
-        </p:spPr>
-        <p:txBody>
-          <a:bodyPr rtlCol="0" anchor="ctr"/>
-          <a:lstStyle/>
-          <a:p>
-            <a:pPr algn="ctr"/>
-          </a:p>
-        </p:txBody>
-      </p:sp>
-      <p:sp>
-        <p:nvSpPr>
-          <p:cNvPr id="6" name="텍스트"/>
-          <p:cNvSpPr txBox="1"/>
-          <p:nvPr/>
-        </p:nvSpPr>
-        <p:spPr>
-          <a:xfrm>
-            <a:off x="396000" y="223200"/>
-            <a:ext cx="2016000" cy="108000"/>
+            <a:off x="1692000" y="223200"/>
+            <a:ext cx="1296000" cy="133351"/>
           </a:xfrm>
           <a:prstGeom prst="rect">
             <a:avLst/>
@@ -3279,13 +3181,13 @@
           <a:p>
             <a:pPr algn="l">
               <a:lnSpc>
-                <a:spcPts val="1087"/>
+                <a:spcPts val="1015"/>
               </a:lnSpc>
             </a:pPr>
             <a:r>
-              <a:rPr sz="750" b="1" spc="150">
+              <a:rPr sz="700" b="1" spc="200">
                 <a:solidFill>
-                  <a:srgbClr val="D2DCE2"/>
+                  <a:srgbClr val="0E3B40"/>
                 </a:solidFill>
                 <a:latin typeface="맑은 고딕"/>
                 <a:ea typeface="맑은 고딕"/>
@@ -3297,14 +3199,14 @@
       </p:sp>
       <p:sp>
         <p:nvSpPr>
-          <p:cNvPr id="7" name="텍스트"/>
+          <p:cNvPr id="5" name="텍스트"/>
           <p:cNvSpPr txBox="1"/>
           <p:nvPr/>
         </p:nvSpPr>
         <p:spPr>
           <a:xfrm>
-            <a:off x="396000" y="540000"/>
-            <a:ext cx="2160000" cy="313692"/>
+            <a:off x="1692000" y="540000"/>
+            <a:ext cx="1368000" cy="360000"/>
           </a:xfrm>
           <a:prstGeom prst="rect">
             <a:avLst/>
@@ -3319,16 +3221,16 @@
           <a:p>
             <a:pPr algn="l">
               <a:lnSpc>
-                <a:spcPts val="2755"/>
+                <a:spcPts val="3190"/>
               </a:lnSpc>
             </a:pPr>
             <a:r>
-              <a:rPr sz="1900" b="1" spc="50">
+              <a:rPr sz="2200" b="1">
                 <a:solidFill>
-                  <a:srgbClr val="FFFFFF"/>
+                  <a:srgbClr val="12151C"/>
                 </a:solidFill>
-                <a:latin typeface="바탕"/>
-                <a:ea typeface="바탕"/>
+                <a:latin typeface="맑은 고딕"/>
+                <a:ea typeface="맑은 고딕"/>
               </a:rPr>
               <a:t>차예준</a:t>
             </a:r>
@@ -3337,14 +3239,14 @@
       </p:sp>
       <p:sp>
         <p:nvSpPr>
-          <p:cNvPr id="8" name="텍스트"/>
+          <p:cNvPr id="6" name="텍스트"/>
           <p:cNvSpPr txBox="1"/>
           <p:nvPr/>
         </p:nvSpPr>
         <p:spPr>
           <a:xfrm>
-            <a:off x="396000" y="835200"/>
-            <a:ext cx="2160000" cy="129600"/>
+            <a:off x="1692000" y="943200"/>
+            <a:ext cx="1368000" cy="171451"/>
           </a:xfrm>
           <a:prstGeom prst="rect">
             <a:avLst/>
@@ -3359,13 +3261,13 @@
           <a:p>
             <a:pPr algn="l">
               <a:lnSpc>
-                <a:spcPts val="1232"/>
+                <a:spcPts val="1305"/>
               </a:lnSpc>
             </a:pPr>
             <a:r>
-              <a:rPr sz="850" b="1">
+              <a:rPr sz="900" b="0">
                 <a:solidFill>
-                  <a:srgbClr val="D3E3EE"/>
+                  <a:srgbClr val="0E3B40"/>
                 </a:solidFill>
                 <a:latin typeface="맑은 고딕"/>
                 <a:ea typeface="맑은 고딕"/>
@@ -3377,20 +3279,20 @@
       </p:sp>
       <p:sp>
         <p:nvSpPr>
-          <p:cNvPr id="9" name="Rectangle 8"/>
+          <p:cNvPr id="7" name="Rectangle 6"/>
           <p:cNvSpPr/>
           <p:nvPr/>
         </p:nvSpPr>
         <p:spPr>
           <a:xfrm>
-            <a:off x="396000" y="1051200"/>
-            <a:ext cx="230400" cy="14400"/>
+            <a:off x="1692000" y="1195200"/>
+            <a:ext cx="144000" cy="18000"/>
           </a:xfrm>
           <a:prstGeom prst="rect">
             <a:avLst/>
           </a:prstGeom>
           <a:solidFill>
-            <a:srgbClr val="D3E3EE"/>
+            <a:srgbClr val="12151C"/>
           </a:solidFill>
           <a:ln>
             <a:noFill/>
@@ -3406,14 +3308,14 @@
       </p:sp>
       <p:sp>
         <p:nvSpPr>
-          <p:cNvPr id="10" name="텍스트"/>
+          <p:cNvPr id="8" name="텍스트"/>
           <p:cNvSpPr txBox="1"/>
           <p:nvPr/>
         </p:nvSpPr>
         <p:spPr>
           <a:xfrm>
-            <a:off x="396000" y="1188000"/>
-            <a:ext cx="122400" cy="168911"/>
+            <a:off x="1692000" y="1328400"/>
+            <a:ext cx="331200" cy="99061"/>
           </a:xfrm>
           <a:prstGeom prst="rect">
             <a:avLst/>
@@ -3428,32 +3330,32 @@
           <a:p>
             <a:pPr algn="l">
               <a:lnSpc>
-                <a:spcPts val="1015"/>
+                <a:spcPts val="754"/>
               </a:lnSpc>
             </a:pPr>
             <a:r>
-              <a:rPr sz="700" b="1">
+              <a:rPr sz="520" b="1" spc="120">
                 <a:solidFill>
-                  <a:srgbClr val="D3E3EE"/>
+                  <a:srgbClr val="0E3B40"/>
                 </a:solidFill>
                 <a:latin typeface="맑은 고딕"/>
                 <a:ea typeface="맑은 고딕"/>
               </a:rPr>
-              <a:t>T</a:t>
-            </a:r>
-          </a:p>
-        </p:txBody>
-      </p:sp>
-      <p:sp>
-        <p:nvSpPr>
-          <p:cNvPr id="11" name="텍스트"/>
+              <a:t>TEL</a:t>
+            </a:r>
+          </a:p>
+        </p:txBody>
+      </p:sp>
+      <p:sp>
+        <p:nvSpPr>
+          <p:cNvPr id="9" name="텍스트"/>
           <p:cNvSpPr txBox="1"/>
           <p:nvPr/>
         </p:nvSpPr>
         <p:spPr>
           <a:xfrm>
-            <a:off x="540000" y="1188000"/>
-            <a:ext cx="1872000" cy="168911"/>
+            <a:off x="2023200" y="1317600"/>
+            <a:ext cx="1188000" cy="125731"/>
           </a:xfrm>
           <a:prstGeom prst="rect">
             <a:avLst/>
@@ -3468,13 +3370,13 @@
           <a:p>
             <a:pPr algn="l">
               <a:lnSpc>
-                <a:spcPts val="1015"/>
+                <a:spcPts val="956"/>
               </a:lnSpc>
             </a:pPr>
             <a:r>
-              <a:rPr sz="700" b="0">
+              <a:rPr sz="660" b="0">
                 <a:solidFill>
-                  <a:srgbClr val="FFFFFF"/>
+                  <a:srgbClr val="12151C"/>
                 </a:solidFill>
                 <a:latin typeface="맑은 고딕"/>
                 <a:ea typeface="맑은 고딕"/>
@@ -3486,14 +3388,14 @@
       </p:sp>
       <p:sp>
         <p:nvSpPr>
-          <p:cNvPr id="12" name="텍스트"/>
+          <p:cNvPr id="10" name="텍스트"/>
           <p:cNvSpPr txBox="1"/>
           <p:nvPr/>
         </p:nvSpPr>
         <p:spPr>
           <a:xfrm>
-            <a:off x="396000" y="1356911"/>
-            <a:ext cx="122400" cy="168911"/>
+            <a:off x="1692000" y="1458000"/>
+            <a:ext cx="331200" cy="99061"/>
           </a:xfrm>
           <a:prstGeom prst="rect">
             <a:avLst/>
@@ -3508,32 +3410,32 @@
           <a:p>
             <a:pPr algn="l">
               <a:lnSpc>
-                <a:spcPts val="1015"/>
+                <a:spcPts val="754"/>
               </a:lnSpc>
             </a:pPr>
             <a:r>
-              <a:rPr sz="700" b="1">
+              <a:rPr sz="520" b="1" spc="120">
                 <a:solidFill>
-                  <a:srgbClr val="D3E3EE"/>
+                  <a:srgbClr val="0E3B40"/>
                 </a:solidFill>
                 <a:latin typeface="맑은 고딕"/>
                 <a:ea typeface="맑은 고딕"/>
               </a:rPr>
-              <a:t>E</a:t>
-            </a:r>
-          </a:p>
-        </p:txBody>
-      </p:sp>
-      <p:sp>
-        <p:nvSpPr>
-          <p:cNvPr id="13" name="텍스트"/>
+              <a:t>MAIL</a:t>
+            </a:r>
+          </a:p>
+        </p:txBody>
+      </p:sp>
+      <p:sp>
+        <p:nvSpPr>
+          <p:cNvPr id="11" name="텍스트"/>
           <p:cNvSpPr txBox="1"/>
           <p:nvPr/>
         </p:nvSpPr>
         <p:spPr>
           <a:xfrm>
-            <a:off x="540000" y="1356911"/>
-            <a:ext cx="1872000" cy="168911"/>
+            <a:off x="2023200" y="1447200"/>
+            <a:ext cx="1188000" cy="125731"/>
           </a:xfrm>
           <a:prstGeom prst="rect">
             <a:avLst/>
@@ -3548,13 +3450,13 @@
           <a:p>
             <a:pPr algn="l">
               <a:lnSpc>
-                <a:spcPts val="1015"/>
+                <a:spcPts val="956"/>
               </a:lnSpc>
             </a:pPr>
             <a:r>
-              <a:rPr sz="700" b="0">
+              <a:rPr sz="660" b="0">
                 <a:solidFill>
-                  <a:srgbClr val="FFFFFF"/>
+                  <a:srgbClr val="12151C"/>
                 </a:solidFill>
                 <a:latin typeface="맑은 고딕"/>
                 <a:ea typeface="맑은 고딕"/>
@@ -3566,14 +3468,14 @@
       </p:sp>
       <p:sp>
         <p:nvSpPr>
-          <p:cNvPr id="14" name="텍스트"/>
+          <p:cNvPr id="12" name="텍스트"/>
           <p:cNvSpPr txBox="1"/>
           <p:nvPr/>
         </p:nvSpPr>
         <p:spPr>
           <a:xfrm>
-            <a:off x="396000" y="1525822"/>
-            <a:ext cx="122400" cy="168911"/>
+            <a:off x="1692000" y="1587600"/>
+            <a:ext cx="331200" cy="99061"/>
           </a:xfrm>
           <a:prstGeom prst="rect">
             <a:avLst/>
@@ -3588,32 +3490,32 @@
           <a:p>
             <a:pPr algn="l">
               <a:lnSpc>
-                <a:spcPts val="1015"/>
+                <a:spcPts val="754"/>
               </a:lnSpc>
             </a:pPr>
             <a:r>
-              <a:rPr sz="700" b="1">
+              <a:rPr sz="520" b="1" spc="120">
                 <a:solidFill>
-                  <a:srgbClr val="D3E3EE"/>
+                  <a:srgbClr val="0E3B40"/>
                 </a:solidFill>
                 <a:latin typeface="맑은 고딕"/>
                 <a:ea typeface="맑은 고딕"/>
               </a:rPr>
-              <a:t>A</a:t>
-            </a:r>
-          </a:p>
-        </p:txBody>
-      </p:sp>
-      <p:sp>
-        <p:nvSpPr>
-          <p:cNvPr id="15" name="텍스트"/>
+              <a:t>ADDR</a:t>
+            </a:r>
+          </a:p>
+        </p:txBody>
+      </p:sp>
+      <p:sp>
+        <p:nvSpPr>
+          <p:cNvPr id="13" name="텍스트"/>
           <p:cNvSpPr txBox="1"/>
           <p:nvPr/>
         </p:nvSpPr>
         <p:spPr>
           <a:xfrm>
-            <a:off x="540000" y="1525822"/>
-            <a:ext cx="1872000" cy="168911"/>
+            <a:off x="2023200" y="1576800"/>
+            <a:ext cx="1188000" cy="125731"/>
           </a:xfrm>
           <a:prstGeom prst="rect">
             <a:avLst/>
@@ -3628,13 +3530,13 @@
           <a:p>
             <a:pPr algn="l">
               <a:lnSpc>
-                <a:spcPts val="1015"/>
+                <a:spcPts val="956"/>
               </a:lnSpc>
             </a:pPr>
             <a:r>
-              <a:rPr sz="700" b="0">
+              <a:rPr sz="660" b="0">
                 <a:solidFill>
-                  <a:srgbClr val="FFFFFF"/>
+                  <a:srgbClr val="12151C"/>
                 </a:solidFill>
                 <a:latin typeface="맑은 고딕"/>
                 <a:ea typeface="맑은 고딕"/>
@@ -3658,7 +3560,7 @@
     <p:bg>
       <p:bgPr>
         <a:solidFill>
-          <a:srgbClr val="3B6482"/>
+          <a:srgbClr val="F3F4F6"/>
         </a:solidFill>
         <a:effectLst/>
       </p:bgPr>
@@ -3678,17 +3580,18 @@
         </p:nvSpPr>
         <p:spPr>
           <a:xfrm>
-            <a:off x="108000" y="108000"/>
-            <a:ext cx="3024000" cy="1584000"/>
+            <a:off x="2304000" y="504000"/>
+            <a:ext cx="684000" cy="684000"/>
           </a:xfrm>
           <a:prstGeom prst="rect">
             <a:avLst/>
           </a:prstGeom>
           <a:noFill/>
-          <a:ln w="10800">
+          <a:ln w="7200">
             <a:solidFill>
-              <a:srgbClr val="D3E3EE"/>
+              <a:srgbClr val="6B7280"/>
             </a:solidFill>
+            <a:prstDash val="dash"/>
           </a:ln>
         </p:spPr>
         <p:txBody>
@@ -3707,8 +3610,8 @@
         </p:nvSpPr>
         <p:spPr>
           <a:xfrm>
-            <a:off x="396000" y="504000"/>
-            <a:ext cx="2448000" cy="432000"/>
+            <a:off x="2304000" y="504000"/>
+            <a:ext cx="684000" cy="684000"/>
           </a:xfrm>
           <a:prstGeom prst="rect">
             <a:avLst/>
@@ -3723,82 +3626,32 @@
           <a:p>
             <a:pPr algn="ctr">
               <a:lnSpc>
-                <a:spcPts val="1739"/>
+                <a:spcPts val="1595"/>
               </a:lnSpc>
             </a:pPr>
             <a:r>
-              <a:rPr sz="1200" b="1">
+              <a:rPr sz="1100" b="1">
                 <a:solidFill>
-                  <a:srgbClr val="FFFFFF"/>
+                  <a:srgbClr val="6B7280"/>
                 </a:solidFill>
                 <a:latin typeface="맑은 고딕"/>
                 <a:ea typeface="맑은 고딕"/>
               </a:rPr>
-              <a:t>기록하고 공유하고 성장합니다</a:t>
-            </a:r>
-          </a:p>
-        </p:txBody>
-      </p:sp>
-      <p:cxnSp>
-        <p:nvCxnSpPr>
-          <p:cNvPr id="4" name="Connector 3"/>
-          <p:cNvCxnSpPr/>
+              <a:t>QR</a:t>
+            </a:r>
+          </a:p>
+        </p:txBody>
+      </p:sp>
+      <p:sp>
+        <p:nvSpPr>
+          <p:cNvPr id="4" name="텍스트"/>
+          <p:cNvSpPr txBox="1"/>
           <p:nvPr/>
-        </p:nvCxnSpPr>
+        </p:nvSpPr>
         <p:spPr>
           <a:xfrm>
-            <a:off x="1260000" y="1080000"/>
-            <a:ext cx="684000" cy="0"/>
-          </a:xfrm>
-          <a:prstGeom prst="line">
-            <a:avLst/>
-          </a:prstGeom>
-          <a:ln w="7200">
-            <a:solidFill>
-              <a:srgbClr val="D3E3EE"/>
-            </a:solidFill>
-          </a:ln>
-        </p:spPr>
-      </p:cxnSp>
-      <p:sp>
-        <p:nvSpPr>
-          <p:cNvPr id="5" name="Oval 4"/>
-          <p:cNvSpPr/>
-          <p:nvPr/>
-        </p:nvSpPr>
-        <p:spPr>
-          <a:xfrm>
-            <a:off x="1594800" y="1054800"/>
-            <a:ext cx="50400" cy="50400"/>
-          </a:xfrm>
-          <a:prstGeom prst="ellipse">
-            <a:avLst/>
-          </a:prstGeom>
-          <a:solidFill>
-            <a:srgbClr val="D3E3EE"/>
-          </a:solidFill>
-          <a:ln>
-            <a:noFill/>
-          </a:ln>
-        </p:spPr>
-        <p:txBody>
-          <a:bodyPr rtlCol="0" anchor="ctr"/>
-          <a:lstStyle/>
-          <a:p>
-            <a:pPr algn="ctr"/>
-          </a:p>
-        </p:txBody>
-      </p:sp>
-      <p:sp>
-        <p:nvSpPr>
-          <p:cNvPr id="6" name="텍스트"/>
-          <p:cNvSpPr txBox="1"/>
-          <p:nvPr/>
-        </p:nvSpPr>
-        <p:spPr>
-          <a:xfrm>
-            <a:off x="360000" y="1224000"/>
-            <a:ext cx="2520000" cy="108000"/>
+            <a:off x="252000" y="504000"/>
+            <a:ext cx="1728000" cy="720000"/>
           </a:xfrm>
           <a:prstGeom prst="rect">
             <a:avLst/>
@@ -3811,121 +3664,107 @@
           </a:bodyPr>
           <a:lstStyle/>
           <a:p>
-            <a:pPr algn="ctr">
+            <a:pPr algn="l">
               <a:lnSpc>
-                <a:spcPts val="1087"/>
+                <a:spcPts val="1739"/>
               </a:lnSpc>
             </a:pPr>
             <a:r>
-              <a:rPr sz="750" b="1" spc="300">
+              <a:rPr sz="1200" b="1">
                 <a:solidFill>
-                  <a:srgbClr val="D2DCE2"/>
+                  <a:srgbClr val="12151C"/>
+                </a:solidFill>
+                <a:latin typeface="맑은 고딕"/>
+                <a:ea typeface="맑은 고딕"/>
+              </a:rPr>
+              <a:t>기록하고 공유하고</a:t>
+            </a:r>
+          </a:p>
+          <a:p>
+            <a:pPr algn="l">
+              <a:lnSpc>
+                <a:spcPts val="1739"/>
+              </a:lnSpc>
+            </a:pPr>
+            <a:r>
+              <a:rPr sz="1200" b="1">
+                <a:solidFill>
+                  <a:srgbClr val="12151C"/>
+                </a:solidFill>
+                <a:latin typeface="맑은 고딕"/>
+                <a:ea typeface="맑은 고딕"/>
+              </a:rPr>
+              <a:t>성장합니다</a:t>
+            </a:r>
+          </a:p>
+        </p:txBody>
+      </p:sp>
+      <p:sp>
+        <p:nvSpPr>
+          <p:cNvPr id="5" name="Rectangle 4"/>
+          <p:cNvSpPr/>
+          <p:nvPr/>
+        </p:nvSpPr>
+        <p:spPr>
+          <a:xfrm>
+            <a:off x="252000" y="1296000"/>
+            <a:ext cx="144000" cy="18000"/>
+          </a:xfrm>
+          <a:prstGeom prst="rect">
+            <a:avLst/>
+          </a:prstGeom>
+          <a:solidFill>
+            <a:srgbClr val="00C2C0"/>
+          </a:solidFill>
+          <a:ln>
+            <a:noFill/>
+          </a:ln>
+        </p:spPr>
+        <p:txBody>
+          <a:bodyPr rtlCol="0" anchor="ctr"/>
+          <a:lstStyle/>
+          <a:p>
+            <a:pPr algn="ctr"/>
+          </a:p>
+        </p:txBody>
+      </p:sp>
+      <p:sp>
+        <p:nvSpPr>
+          <p:cNvPr id="6" name="텍스트"/>
+          <p:cNvSpPr txBox="1"/>
+          <p:nvPr/>
+        </p:nvSpPr>
+        <p:spPr>
+          <a:xfrm>
+            <a:off x="252000" y="1404000"/>
+            <a:ext cx="1656000" cy="133351"/>
+          </a:xfrm>
+          <a:prstGeom prst="rect">
+            <a:avLst/>
+          </a:prstGeom>
+          <a:noFill/>
+        </p:spPr>
+        <p:txBody>
+          <a:bodyPr wrap="square" lIns="0" rIns="0" tIns="0" bIns="0" anchor="t">
+            <a:spAutoFit/>
+          </a:bodyPr>
+          <a:lstStyle/>
+          <a:p>
+            <a:pPr algn="l">
+              <a:lnSpc>
+                <a:spcPts val="1015"/>
+              </a:lnSpc>
+            </a:pPr>
+            <a:r>
+              <a:rPr sz="700" b="1" spc="200">
+                <a:solidFill>
+                  <a:srgbClr val="6B7280"/>
                 </a:solidFill>
                 <a:latin typeface="맑은 고딕"/>
                 <a:ea typeface="맑은 고딕"/>
               </a:rPr>
               <a:t>소속 · 브랜드</a:t>
             </a:r>
-          </a:p>
-        </p:txBody>
-      </p:sp>
-      <p:sp>
-        <p:nvSpPr>
-          <p:cNvPr id="7" name="Freeform 6"/>
-          <p:cNvSpPr/>
-          <p:nvPr/>
-        </p:nvSpPr>
-        <p:spPr>
-          <a:xfrm>
-            <a:off x="1537200" y="273600"/>
-            <a:ext cx="79200" cy="115200"/>
-          </a:xfrm>
-          <a:custGeom>
-            <a:avLst/>
-            <a:gdLst/>
-            <a:ahLst/>
-            <a:cxnLst/>
-            <a:rect l="l" t="t" r="r" b="b"/>
-            <a:pathLst>
-              <a:path w="79200" h="115200">
-                <a:moveTo>
-                  <a:pt x="0" y="0"/>
-                </a:moveTo>
-                <a:lnTo>
-                  <a:pt x="79200" y="14400"/>
-                </a:lnTo>
-                <a:lnTo>
-                  <a:pt x="79200" y="115200"/>
-                </a:lnTo>
-                <a:lnTo>
-                  <a:pt x="0" y="100800"/>
-                </a:lnTo>
-                <a:close/>
-              </a:path>
-            </a:pathLst>
-          </a:custGeom>
-          <a:solidFill>
-            <a:srgbClr val="D3E3EE"/>
-          </a:solidFill>
-          <a:ln>
-            <a:noFill/>
-          </a:ln>
-        </p:spPr>
-        <p:txBody>
-          <a:bodyPr rtlCol="0" anchor="ctr"/>
-          <a:lstStyle/>
-          <a:p>
-            <a:pPr algn="ctr"/>
-          </a:p>
-        </p:txBody>
-      </p:sp>
-      <p:sp>
-        <p:nvSpPr>
-          <p:cNvPr id="8" name="Freeform 7"/>
-          <p:cNvSpPr/>
-          <p:nvPr/>
-        </p:nvSpPr>
-        <p:spPr>
-          <a:xfrm>
-            <a:off x="1623600" y="273600"/>
-            <a:ext cx="79200" cy="115200"/>
-          </a:xfrm>
-          <a:custGeom>
-            <a:avLst/>
-            <a:gdLst/>
-            <a:ahLst/>
-            <a:cxnLst/>
-            <a:rect l="l" t="t" r="r" b="b"/>
-            <a:pathLst>
-              <a:path w="79200" h="115200">
-                <a:moveTo>
-                  <a:pt x="79200" y="0"/>
-                </a:moveTo>
-                <a:lnTo>
-                  <a:pt x="0" y="14400"/>
-                </a:lnTo>
-                <a:lnTo>
-                  <a:pt x="0" y="115200"/>
-                </a:lnTo>
-                <a:lnTo>
-                  <a:pt x="79200" y="100800"/>
-                </a:lnTo>
-                <a:close/>
-              </a:path>
-            </a:pathLst>
-          </a:custGeom>
-          <a:solidFill>
-            <a:srgbClr val="5A7D96"/>
-          </a:solidFill>
-          <a:ln>
-            <a:noFill/>
-          </a:ln>
-        </p:spPr>
-        <p:txBody>
-          <a:bodyPr rtlCol="0" anchor="ctr"/>
-          <a:lstStyle/>
-          <a:p>
-            <a:pPr algn="ctr"/>
           </a:p>
         </p:txBody>
       </p:sp>

--- a/public/fun/cards/expert/expert-31.pptx
+++ b/public/fun/cards/expert/expert-31.pptx
@@ -3097,196 +3097,37 @@
         <p:nvPr/>
       </p:nvGrpSpPr>
       <p:grpSpPr/>
-      <p:sp>
-        <p:nvSpPr>
-          <p:cNvPr id="2" name="Oval 1"/>
+      <p:cxnSp>
+        <p:nvCxnSpPr>
+          <p:cNvPr id="2" name="Connector 1"/>
+          <p:cNvCxnSpPr/>
+          <p:nvPr/>
+        </p:nvCxnSpPr>
+        <p:spPr>
+          <a:xfrm>
+            <a:off x="1080000" y="252000"/>
+            <a:ext cx="0" cy="1296000"/>
+          </a:xfrm>
+          <a:prstGeom prst="line">
+            <a:avLst/>
+          </a:prstGeom>
+          <a:ln w="3600">
+            <a:solidFill>
+              <a:srgbClr val="077D7E"/>
+            </a:solidFill>
+          </a:ln>
+        </p:spPr>
+      </p:cxnSp>
+      <p:sp>
+        <p:nvSpPr>
+          <p:cNvPr id="3" name="Rectangle 2"/>
           <p:cNvSpPr/>
           <p:nvPr/>
         </p:nvSpPr>
         <p:spPr>
           <a:xfrm>
-            <a:off x="547200" y="475200"/>
-            <a:ext cx="849600" cy="849600"/>
-          </a:xfrm>
-          <a:prstGeom prst="ellipse">
-            <a:avLst/>
-          </a:prstGeom>
-          <a:solidFill>
-            <a:srgbClr val="33CECD"/>
-          </a:solidFill>
-          <a:ln>
-            <a:noFill/>
-          </a:ln>
-        </p:spPr>
-        <p:txBody>
-          <a:bodyPr rtlCol="0" anchor="ctr"/>
-          <a:lstStyle/>
-          <a:p>
-            <a:pPr algn="ctr"/>
-          </a:p>
-        </p:txBody>
-      </p:sp>
-      <p:sp>
-        <p:nvSpPr>
-          <p:cNvPr id="3" name="Oval 2"/>
-          <p:cNvSpPr/>
-          <p:nvPr/>
-        </p:nvSpPr>
-        <p:spPr>
-          <a:xfrm>
-            <a:off x="187200" y="475200"/>
-            <a:ext cx="849600" cy="849600"/>
-          </a:xfrm>
-          <a:prstGeom prst="ellipse">
-            <a:avLst/>
-          </a:prstGeom>
-          <a:solidFill>
-            <a:srgbClr val="12151C">
-              <a:alpha val="92000"/>
-            </a:srgbClr>
-          </a:solidFill>
-          <a:ln>
-            <a:noFill/>
-          </a:ln>
-        </p:spPr>
-        <p:txBody>
-          <a:bodyPr rtlCol="0" anchor="ctr"/>
-          <a:lstStyle/>
-          <a:p>
-            <a:pPr algn="ctr"/>
-          </a:p>
-        </p:txBody>
-      </p:sp>
-      <p:sp>
-        <p:nvSpPr>
-          <p:cNvPr id="4" name="텍스트"/>
-          <p:cNvSpPr txBox="1"/>
-          <p:nvPr/>
-        </p:nvSpPr>
-        <p:spPr>
-          <a:xfrm>
-            <a:off x="1692000" y="223200"/>
-            <a:ext cx="1296000" cy="133351"/>
-          </a:xfrm>
-          <a:prstGeom prst="rect">
-            <a:avLst/>
-          </a:prstGeom>
-          <a:noFill/>
-        </p:spPr>
-        <p:txBody>
-          <a:bodyPr wrap="square" lIns="0" rIns="0" tIns="0" bIns="0" anchor="t">
-            <a:spAutoFit/>
-          </a:bodyPr>
-          <a:lstStyle/>
-          <a:p>
-            <a:pPr algn="l">
-              <a:lnSpc>
-                <a:spcPts val="1015"/>
-              </a:lnSpc>
-            </a:pPr>
-            <a:r>
-              <a:rPr sz="700" b="1" spc="200">
-                <a:solidFill>
-                  <a:srgbClr val="0E3B40"/>
-                </a:solidFill>
-                <a:latin typeface="맑은 고딕"/>
-                <a:ea typeface="맑은 고딕"/>
-              </a:rPr>
-              <a:t>소속 · 브랜드</a:t>
-            </a:r>
-          </a:p>
-        </p:txBody>
-      </p:sp>
-      <p:sp>
-        <p:nvSpPr>
-          <p:cNvPr id="5" name="텍스트"/>
-          <p:cNvSpPr txBox="1"/>
-          <p:nvPr/>
-        </p:nvSpPr>
-        <p:spPr>
-          <a:xfrm>
-            <a:off x="1692000" y="540000"/>
-            <a:ext cx="1368000" cy="360000"/>
-          </a:xfrm>
-          <a:prstGeom prst="rect">
-            <a:avLst/>
-          </a:prstGeom>
-          <a:noFill/>
-        </p:spPr>
-        <p:txBody>
-          <a:bodyPr wrap="square" lIns="0" rIns="0" tIns="0" bIns="0" anchor="t">
-            <a:spAutoFit/>
-          </a:bodyPr>
-          <a:lstStyle/>
-          <a:p>
-            <a:pPr algn="l">
-              <a:lnSpc>
-                <a:spcPts val="3190"/>
-              </a:lnSpc>
-            </a:pPr>
-            <a:r>
-              <a:rPr sz="2200" b="1">
-                <a:solidFill>
-                  <a:srgbClr val="12151C"/>
-                </a:solidFill>
-                <a:latin typeface="맑은 고딕"/>
-                <a:ea typeface="맑은 고딕"/>
-              </a:rPr>
-              <a:t>차예준</a:t>
-            </a:r>
-          </a:p>
-        </p:txBody>
-      </p:sp>
-      <p:sp>
-        <p:nvSpPr>
-          <p:cNvPr id="6" name="텍스트"/>
-          <p:cNvSpPr txBox="1"/>
-          <p:nvPr/>
-        </p:nvSpPr>
-        <p:spPr>
-          <a:xfrm>
-            <a:off x="1692000" y="943200"/>
-            <a:ext cx="1368000" cy="171451"/>
-          </a:xfrm>
-          <a:prstGeom prst="rect">
-            <a:avLst/>
-          </a:prstGeom>
-          <a:noFill/>
-        </p:spPr>
-        <p:txBody>
-          <a:bodyPr wrap="square" lIns="0" rIns="0" tIns="0" bIns="0" anchor="t">
-            <a:spAutoFit/>
-          </a:bodyPr>
-          <a:lstStyle/>
-          <a:p>
-            <a:pPr algn="l">
-              <a:lnSpc>
-                <a:spcPts val="1305"/>
-              </a:lnSpc>
-            </a:pPr>
-            <a:r>
-              <a:rPr sz="900" b="0">
-                <a:solidFill>
-                  <a:srgbClr val="0E3B40"/>
-                </a:solidFill>
-                <a:latin typeface="맑은 고딕"/>
-                <a:ea typeface="맑은 고딕"/>
-              </a:rPr>
-              <a:t>프리랜서 개발자</a:t>
-            </a:r>
-          </a:p>
-        </p:txBody>
-      </p:sp>
-      <p:sp>
-        <p:nvSpPr>
-          <p:cNvPr id="7" name="Rectangle 6"/>
-          <p:cNvSpPr/>
-          <p:nvPr/>
-        </p:nvSpPr>
-        <p:spPr>
-          <a:xfrm>
-            <a:off x="1692000" y="1195200"/>
-            <a:ext cx="144000" cy="18000"/>
+            <a:off x="1069200" y="252000"/>
+            <a:ext cx="21600" cy="201600"/>
           </a:xfrm>
           <a:prstGeom prst="rect">
             <a:avLst/>
@@ -3308,14 +3149,14 @@
       </p:sp>
       <p:sp>
         <p:nvSpPr>
-          <p:cNvPr id="8" name="텍스트"/>
+          <p:cNvPr id="4" name="텍스트"/>
           <p:cNvSpPr txBox="1"/>
           <p:nvPr/>
         </p:nvSpPr>
         <p:spPr>
           <a:xfrm>
-            <a:off x="1692000" y="1328400"/>
-            <a:ext cx="331200" cy="99061"/>
+            <a:off x="252000" y="252000"/>
+            <a:ext cx="756000" cy="123826"/>
           </a:xfrm>
           <a:prstGeom prst="rect">
             <a:avLst/>
@@ -3330,11 +3171,221 @@
           <a:p>
             <a:pPr algn="l">
               <a:lnSpc>
-                <a:spcPts val="754"/>
+                <a:spcPts val="942"/>
               </a:lnSpc>
             </a:pPr>
             <a:r>
-              <a:rPr sz="520" b="1" spc="120">
+              <a:rPr sz="650" b="1" spc="220">
+                <a:solidFill>
+                  <a:srgbClr val="0E3B40"/>
+                </a:solidFill>
+                <a:latin typeface="맑은 고딕"/>
+                <a:ea typeface="맑은 고딕"/>
+              </a:rPr>
+              <a:t>소속 · 브랜드</a:t>
+            </a:r>
+          </a:p>
+        </p:txBody>
+      </p:sp>
+      <p:sp>
+        <p:nvSpPr>
+          <p:cNvPr id="5" name="Oval 4"/>
+          <p:cNvSpPr/>
+          <p:nvPr/>
+        </p:nvSpPr>
+        <p:spPr>
+          <a:xfrm>
+            <a:off x="273600" y="734400"/>
+            <a:ext cx="244800" cy="244800"/>
+          </a:xfrm>
+          <a:prstGeom prst="ellipse">
+            <a:avLst/>
+          </a:prstGeom>
+          <a:noFill/>
+          <a:ln w="5040">
+            <a:solidFill>
+              <a:srgbClr val="12151C"/>
+            </a:solidFill>
+          </a:ln>
+        </p:spPr>
+        <p:txBody>
+          <a:bodyPr rtlCol="0" anchor="ctr"/>
+          <a:lstStyle/>
+          <a:p>
+            <a:pPr algn="ctr"/>
+          </a:p>
+        </p:txBody>
+      </p:sp>
+      <p:sp>
+        <p:nvSpPr>
+          <p:cNvPr id="6" name="텍스트"/>
+          <p:cNvSpPr txBox="1"/>
+          <p:nvPr/>
+        </p:nvSpPr>
+        <p:spPr>
+          <a:xfrm>
+            <a:off x="252000" y="734400"/>
+            <a:ext cx="288000" cy="252000"/>
+          </a:xfrm>
+          <a:prstGeom prst="rect">
+            <a:avLst/>
+          </a:prstGeom>
+          <a:noFill/>
+        </p:spPr>
+        <p:txBody>
+          <a:bodyPr wrap="square" lIns="0" rIns="0" tIns="0" bIns="0" anchor="ctr">
+            <a:spAutoFit/>
+          </a:bodyPr>
+          <a:lstStyle/>
+          <a:p>
+            <a:pPr algn="ctr">
+              <a:lnSpc>
+                <a:spcPts val="1305"/>
+              </a:lnSpc>
+            </a:pPr>
+            <a:r>
+              <a:rPr sz="900" b="1">
+                <a:solidFill>
+                  <a:srgbClr val="12151C"/>
+                </a:solidFill>
+                <a:latin typeface="맑은 고딕"/>
+                <a:ea typeface="맑은 고딕"/>
+              </a:rPr>
+              <a:t>소</a:t>
+            </a:r>
+          </a:p>
+        </p:txBody>
+      </p:sp>
+      <p:sp>
+        <p:nvSpPr>
+          <p:cNvPr id="7" name="텍스트"/>
+          <p:cNvSpPr txBox="1"/>
+          <p:nvPr/>
+        </p:nvSpPr>
+        <p:spPr>
+          <a:xfrm>
+            <a:off x="1260000" y="432000"/>
+            <a:ext cx="1800000" cy="237600"/>
+          </a:xfrm>
+          <a:prstGeom prst="rect">
+            <a:avLst/>
+          </a:prstGeom>
+          <a:noFill/>
+        </p:spPr>
+        <p:txBody>
+          <a:bodyPr wrap="square" lIns="0" rIns="0" tIns="0" bIns="0" anchor="t">
+            <a:spAutoFit/>
+          </a:bodyPr>
+          <a:lstStyle/>
+          <a:p>
+            <a:pPr algn="l">
+              <a:lnSpc>
+                <a:spcPts val="1957"/>
+              </a:lnSpc>
+            </a:pPr>
+            <a:r>
+              <a:rPr sz="1350" b="1" spc="120">
+                <a:solidFill>
+                  <a:srgbClr val="12151C"/>
+                </a:solidFill>
+                <a:latin typeface="맑은 고딕"/>
+                <a:ea typeface="맑은 고딕"/>
+              </a:rPr>
+              <a:t>차예준</a:t>
+            </a:r>
+          </a:p>
+        </p:txBody>
+      </p:sp>
+      <p:sp>
+        <p:nvSpPr>
+          <p:cNvPr id="8" name="텍스트"/>
+          <p:cNvSpPr txBox="1"/>
+          <p:nvPr/>
+        </p:nvSpPr>
+        <p:spPr>
+          <a:xfrm>
+            <a:off x="1260000" y="684000"/>
+            <a:ext cx="1800000" cy="133351"/>
+          </a:xfrm>
+          <a:prstGeom prst="rect">
+            <a:avLst/>
+          </a:prstGeom>
+          <a:noFill/>
+        </p:spPr>
+        <p:txBody>
+          <a:bodyPr wrap="square" lIns="0" rIns="0" tIns="0" bIns="0" anchor="t">
+            <a:spAutoFit/>
+          </a:bodyPr>
+          <a:lstStyle/>
+          <a:p>
+            <a:pPr algn="l">
+              <a:lnSpc>
+                <a:spcPts val="1015"/>
+              </a:lnSpc>
+            </a:pPr>
+            <a:r>
+              <a:rPr sz="700" b="0" spc="60">
+                <a:solidFill>
+                  <a:srgbClr val="0E3B40"/>
+                </a:solidFill>
+                <a:latin typeface="맑은 고딕"/>
+                <a:ea typeface="맑은 고딕"/>
+              </a:rPr>
+              <a:t>프리랜서 개발자</a:t>
+            </a:r>
+          </a:p>
+        </p:txBody>
+      </p:sp>
+      <p:cxnSp>
+        <p:nvCxnSpPr>
+          <p:cNvPr id="9" name="Connector 8"/>
+          <p:cNvCxnSpPr/>
+          <p:nvPr/>
+        </p:nvCxnSpPr>
+        <p:spPr>
+          <a:xfrm>
+            <a:off x="1260000" y="943200"/>
+            <a:ext cx="1728000" cy="0"/>
+          </a:xfrm>
+          <a:prstGeom prst="line">
+            <a:avLst/>
+          </a:prstGeom>
+          <a:ln w="3600">
+            <a:solidFill>
+              <a:srgbClr val="077D7E"/>
+            </a:solidFill>
+          </a:ln>
+        </p:spPr>
+      </p:cxnSp>
+      <p:sp>
+        <p:nvSpPr>
+          <p:cNvPr id="10" name="텍스트"/>
+          <p:cNvSpPr txBox="1"/>
+          <p:nvPr/>
+        </p:nvSpPr>
+        <p:spPr>
+          <a:xfrm>
+            <a:off x="1260000" y="1054800"/>
+            <a:ext cx="331200" cy="91441"/>
+          </a:xfrm>
+          <a:prstGeom prst="rect">
+            <a:avLst/>
+          </a:prstGeom>
+          <a:noFill/>
+        </p:spPr>
+        <p:txBody>
+          <a:bodyPr wrap="square" lIns="0" rIns="0" tIns="0" bIns="0" anchor="t">
+            <a:spAutoFit/>
+          </a:bodyPr>
+          <a:lstStyle/>
+          <a:p>
+            <a:pPr algn="l">
+              <a:lnSpc>
+                <a:spcPts val="696"/>
+              </a:lnSpc>
+            </a:pPr>
+            <a:r>
+              <a:rPr sz="480" b="1" spc="140">
                 <a:solidFill>
                   <a:srgbClr val="0E3B40"/>
                 </a:solidFill>
@@ -3348,14 +3399,14 @@
       </p:sp>
       <p:sp>
         <p:nvSpPr>
-          <p:cNvPr id="9" name="텍스트"/>
+          <p:cNvPr id="11" name="텍스트"/>
           <p:cNvSpPr txBox="1"/>
           <p:nvPr/>
         </p:nvSpPr>
         <p:spPr>
           <a:xfrm>
-            <a:off x="2023200" y="1317600"/>
-            <a:ext cx="1188000" cy="125731"/>
+            <a:off x="1591200" y="1044000"/>
+            <a:ext cx="1188000" cy="123826"/>
           </a:xfrm>
           <a:prstGeom prst="rect">
             <a:avLst/>
@@ -3370,11 +3421,11 @@
           <a:p>
             <a:pPr algn="l">
               <a:lnSpc>
-                <a:spcPts val="956"/>
+                <a:spcPts val="942"/>
               </a:lnSpc>
             </a:pPr>
             <a:r>
-              <a:rPr sz="660" b="0">
+              <a:rPr sz="650" b="0">
                 <a:solidFill>
                   <a:srgbClr val="12151C"/>
                 </a:solidFill>
@@ -3388,14 +3439,14 @@
       </p:sp>
       <p:sp>
         <p:nvSpPr>
-          <p:cNvPr id="10" name="텍스트"/>
+          <p:cNvPr id="12" name="텍스트"/>
           <p:cNvSpPr txBox="1"/>
           <p:nvPr/>
         </p:nvSpPr>
         <p:spPr>
           <a:xfrm>
-            <a:off x="1692000" y="1458000"/>
-            <a:ext cx="331200" cy="99061"/>
+            <a:off x="1260000" y="1184400"/>
+            <a:ext cx="331200" cy="91441"/>
           </a:xfrm>
           <a:prstGeom prst="rect">
             <a:avLst/>
@@ -3410,11 +3461,11 @@
           <a:p>
             <a:pPr algn="l">
               <a:lnSpc>
-                <a:spcPts val="754"/>
+                <a:spcPts val="696"/>
               </a:lnSpc>
             </a:pPr>
             <a:r>
-              <a:rPr sz="520" b="1" spc="120">
+              <a:rPr sz="480" b="1" spc="140">
                 <a:solidFill>
                   <a:srgbClr val="0E3B40"/>
                 </a:solidFill>
@@ -3428,14 +3479,14 @@
       </p:sp>
       <p:sp>
         <p:nvSpPr>
-          <p:cNvPr id="11" name="텍스트"/>
+          <p:cNvPr id="13" name="텍스트"/>
           <p:cNvSpPr txBox="1"/>
           <p:nvPr/>
         </p:nvSpPr>
         <p:spPr>
           <a:xfrm>
-            <a:off x="2023200" y="1447200"/>
-            <a:ext cx="1188000" cy="125731"/>
+            <a:off x="1591200" y="1173600"/>
+            <a:ext cx="1188000" cy="123826"/>
           </a:xfrm>
           <a:prstGeom prst="rect">
             <a:avLst/>
@@ -3450,11 +3501,11 @@
           <a:p>
             <a:pPr algn="l">
               <a:lnSpc>
-                <a:spcPts val="956"/>
+                <a:spcPts val="942"/>
               </a:lnSpc>
             </a:pPr>
             <a:r>
-              <a:rPr sz="660" b="0">
+              <a:rPr sz="650" b="0">
                 <a:solidFill>
                   <a:srgbClr val="12151C"/>
                 </a:solidFill>
@@ -3468,14 +3519,14 @@
       </p:sp>
       <p:sp>
         <p:nvSpPr>
-          <p:cNvPr id="12" name="텍스트"/>
+          <p:cNvPr id="14" name="텍스트"/>
           <p:cNvSpPr txBox="1"/>
           <p:nvPr/>
         </p:nvSpPr>
         <p:spPr>
           <a:xfrm>
-            <a:off x="1692000" y="1587600"/>
-            <a:ext cx="331200" cy="99061"/>
+            <a:off x="1260000" y="1314000"/>
+            <a:ext cx="331200" cy="91441"/>
           </a:xfrm>
           <a:prstGeom prst="rect">
             <a:avLst/>
@@ -3490,11 +3541,11 @@
           <a:p>
             <a:pPr algn="l">
               <a:lnSpc>
-                <a:spcPts val="754"/>
+                <a:spcPts val="696"/>
               </a:lnSpc>
             </a:pPr>
             <a:r>
-              <a:rPr sz="520" b="1" spc="120">
+              <a:rPr sz="480" b="1" spc="140">
                 <a:solidFill>
                   <a:srgbClr val="0E3B40"/>
                 </a:solidFill>
@@ -3508,14 +3559,14 @@
       </p:sp>
       <p:sp>
         <p:nvSpPr>
-          <p:cNvPr id="13" name="텍스트"/>
+          <p:cNvPr id="15" name="텍스트"/>
           <p:cNvSpPr txBox="1"/>
           <p:nvPr/>
         </p:nvSpPr>
         <p:spPr>
           <a:xfrm>
-            <a:off x="2023200" y="1576800"/>
-            <a:ext cx="1188000" cy="125731"/>
+            <a:off x="1591200" y="1303200"/>
+            <a:ext cx="1188000" cy="123826"/>
           </a:xfrm>
           <a:prstGeom prst="rect">
             <a:avLst/>
@@ -3530,11 +3581,11 @@
           <a:p>
             <a:pPr algn="l">
               <a:lnSpc>
-                <a:spcPts val="956"/>
+                <a:spcPts val="942"/>
               </a:lnSpc>
             </a:pPr>
             <a:r>
-              <a:rPr sz="660" b="0">
+              <a:rPr sz="650" b="0">
                 <a:solidFill>
                   <a:srgbClr val="12151C"/>
                 </a:solidFill>
@@ -3572,22 +3623,477 @@
         <p:nvPr/>
       </p:nvGrpSpPr>
       <p:grpSpPr/>
-      <p:sp>
-        <p:nvSpPr>
-          <p:cNvPr id="2" name="Rectangle 1"/>
-          <p:cNvSpPr/>
+      <p:cxnSp>
+        <p:nvCxnSpPr>
+          <p:cNvPr id="2" name="Connector 1"/>
+          <p:cNvCxnSpPr/>
           <p:nvPr/>
-        </p:nvSpPr>
-        <p:spPr>
-          <a:xfrm>
-            <a:off x="2304000" y="504000"/>
-            <a:ext cx="684000" cy="684000"/>
+        </p:nvCxnSpPr>
+        <p:spPr>
+          <a:xfrm>
+            <a:off x="396000" y="360000"/>
+            <a:ext cx="0" cy="446400"/>
+          </a:xfrm>
+          <a:prstGeom prst="line">
+            <a:avLst/>
+          </a:prstGeom>
+          <a:ln w="5760">
+            <a:solidFill>
+              <a:srgbClr val="00C2C0"/>
+            </a:solidFill>
+          </a:ln>
+        </p:spPr>
+      </p:cxnSp>
+      <p:sp>
+        <p:nvSpPr>
+          <p:cNvPr id="3" name="텍스트"/>
+          <p:cNvSpPr txBox="1"/>
+          <p:nvPr/>
+        </p:nvSpPr>
+        <p:spPr>
+          <a:xfrm>
+            <a:off x="252000" y="187200"/>
+            <a:ext cx="1440000" cy="99061"/>
           </a:xfrm>
           <a:prstGeom prst="rect">
             <a:avLst/>
           </a:prstGeom>
           <a:noFill/>
-          <a:ln w="7200">
+        </p:spPr>
+        <p:txBody>
+          <a:bodyPr wrap="square" lIns="0" rIns="0" tIns="0" bIns="0" anchor="t">
+            <a:spAutoFit/>
+          </a:bodyPr>
+          <a:lstStyle/>
+          <a:p>
+            <a:pPr algn="l">
+              <a:lnSpc>
+                <a:spcPts val="754"/>
+              </a:lnSpc>
+            </a:pPr>
+            <a:r>
+              <a:rPr sz="520" b="1" spc="240">
+                <a:solidFill>
+                  <a:srgbClr val="6B7280"/>
+                </a:solidFill>
+                <a:latin typeface="맑은 고딕"/>
+                <a:ea typeface="맑은 고딕"/>
+              </a:rPr>
+              <a:t>전문 분야</a:t>
+            </a:r>
+          </a:p>
+        </p:txBody>
+      </p:sp>
+      <p:sp>
+        <p:nvSpPr>
+          <p:cNvPr id="4" name="Oval 3"/>
+          <p:cNvSpPr/>
+          <p:nvPr/>
+        </p:nvSpPr>
+        <p:spPr>
+          <a:xfrm>
+            <a:off x="367200" y="374400"/>
+            <a:ext cx="57600" cy="57600"/>
+          </a:xfrm>
+          <a:prstGeom prst="ellipse">
+            <a:avLst/>
+          </a:prstGeom>
+          <a:solidFill>
+            <a:srgbClr val="00C2C0"/>
+          </a:solidFill>
+          <a:ln w="5760">
+            <a:solidFill>
+              <a:srgbClr val="00C2C0"/>
+            </a:solidFill>
+          </a:ln>
+        </p:spPr>
+        <p:txBody>
+          <a:bodyPr rtlCol="0" anchor="ctr"/>
+          <a:lstStyle/>
+          <a:p>
+            <a:pPr algn="ctr"/>
+          </a:p>
+        </p:txBody>
+      </p:sp>
+      <p:sp>
+        <p:nvSpPr>
+          <p:cNvPr id="5" name="텍스트"/>
+          <p:cNvSpPr txBox="1"/>
+          <p:nvPr/>
+        </p:nvSpPr>
+        <p:spPr>
+          <a:xfrm>
+            <a:off x="540000" y="331200"/>
+            <a:ext cx="1512000" cy="158400"/>
+          </a:xfrm>
+          <a:prstGeom prst="rect">
+            <a:avLst/>
+          </a:prstGeom>
+          <a:noFill/>
+        </p:spPr>
+        <p:txBody>
+          <a:bodyPr wrap="square" lIns="0" rIns="0" tIns="0" bIns="0" anchor="t">
+            <a:spAutoFit/>
+          </a:bodyPr>
+          <a:lstStyle/>
+          <a:p>
+            <a:pPr algn="l">
+              <a:lnSpc>
+                <a:spcPts val="1073"/>
+              </a:lnSpc>
+            </a:pPr>
+            <a:r>
+              <a:rPr sz="740" b="1">
+                <a:solidFill>
+                  <a:srgbClr val="12151C"/>
+                </a:solidFill>
+                <a:latin typeface="맑은 고딕"/>
+                <a:ea typeface="맑은 고딕"/>
+              </a:rPr>
+              <a:t>앱 개발</a:t>
+            </a:r>
+          </a:p>
+        </p:txBody>
+      </p:sp>
+      <p:sp>
+        <p:nvSpPr>
+          <p:cNvPr id="6" name="Oval 5"/>
+          <p:cNvSpPr/>
+          <p:nvPr/>
+        </p:nvSpPr>
+        <p:spPr>
+          <a:xfrm>
+            <a:off x="367200" y="597600"/>
+            <a:ext cx="57600" cy="57600"/>
+          </a:xfrm>
+          <a:prstGeom prst="ellipse">
+            <a:avLst/>
+          </a:prstGeom>
+          <a:solidFill>
+            <a:srgbClr val="F3F4F6"/>
+          </a:solidFill>
+          <a:ln w="5760">
+            <a:solidFill>
+              <a:srgbClr val="00C2C0"/>
+            </a:solidFill>
+          </a:ln>
+        </p:spPr>
+        <p:txBody>
+          <a:bodyPr rtlCol="0" anchor="ctr"/>
+          <a:lstStyle/>
+          <a:p>
+            <a:pPr algn="ctr"/>
+          </a:p>
+        </p:txBody>
+      </p:sp>
+      <p:sp>
+        <p:nvSpPr>
+          <p:cNvPr id="7" name="텍스트"/>
+          <p:cNvSpPr txBox="1"/>
+          <p:nvPr/>
+        </p:nvSpPr>
+        <p:spPr>
+          <a:xfrm>
+            <a:off x="540000" y="554400"/>
+            <a:ext cx="1512000" cy="158400"/>
+          </a:xfrm>
+          <a:prstGeom prst="rect">
+            <a:avLst/>
+          </a:prstGeom>
+          <a:noFill/>
+        </p:spPr>
+        <p:txBody>
+          <a:bodyPr wrap="square" lIns="0" rIns="0" tIns="0" bIns="0" anchor="t">
+            <a:spAutoFit/>
+          </a:bodyPr>
+          <a:lstStyle/>
+          <a:p>
+            <a:pPr algn="l">
+              <a:lnSpc>
+                <a:spcPts val="1073"/>
+              </a:lnSpc>
+            </a:pPr>
+            <a:r>
+              <a:rPr sz="740" b="1">
+                <a:solidFill>
+                  <a:srgbClr val="12151C"/>
+                </a:solidFill>
+                <a:latin typeface="맑은 고딕"/>
+                <a:ea typeface="맑은 고딕"/>
+              </a:rPr>
+              <a:t>번역</a:t>
+            </a:r>
+          </a:p>
+        </p:txBody>
+      </p:sp>
+      <p:sp>
+        <p:nvSpPr>
+          <p:cNvPr id="8" name="Oval 7"/>
+          <p:cNvSpPr/>
+          <p:nvPr/>
+        </p:nvSpPr>
+        <p:spPr>
+          <a:xfrm>
+            <a:off x="367200" y="820800"/>
+            <a:ext cx="57600" cy="57600"/>
+          </a:xfrm>
+          <a:prstGeom prst="ellipse">
+            <a:avLst/>
+          </a:prstGeom>
+          <a:solidFill>
+            <a:srgbClr val="F3F4F6"/>
+          </a:solidFill>
+          <a:ln w="5760">
+            <a:solidFill>
+              <a:srgbClr val="00C2C0"/>
+            </a:solidFill>
+          </a:ln>
+        </p:spPr>
+        <p:txBody>
+          <a:bodyPr rtlCol="0" anchor="ctr"/>
+          <a:lstStyle/>
+          <a:p>
+            <a:pPr algn="ctr"/>
+          </a:p>
+        </p:txBody>
+      </p:sp>
+      <p:sp>
+        <p:nvSpPr>
+          <p:cNvPr id="9" name="텍스트"/>
+          <p:cNvSpPr txBox="1"/>
+          <p:nvPr/>
+        </p:nvSpPr>
+        <p:spPr>
+          <a:xfrm>
+            <a:off x="540000" y="777600"/>
+            <a:ext cx="1512000" cy="158400"/>
+          </a:xfrm>
+          <a:prstGeom prst="rect">
+            <a:avLst/>
+          </a:prstGeom>
+          <a:noFill/>
+        </p:spPr>
+        <p:txBody>
+          <a:bodyPr wrap="square" lIns="0" rIns="0" tIns="0" bIns="0" anchor="t">
+            <a:spAutoFit/>
+          </a:bodyPr>
+          <a:lstStyle/>
+          <a:p>
+            <a:pPr algn="l">
+              <a:lnSpc>
+                <a:spcPts val="1073"/>
+              </a:lnSpc>
+            </a:pPr>
+            <a:r>
+              <a:rPr sz="740" b="1">
+                <a:solidFill>
+                  <a:srgbClr val="12151C"/>
+                </a:solidFill>
+                <a:latin typeface="맑은 고딕"/>
+                <a:ea typeface="맑은 고딕"/>
+              </a:rPr>
+              <a:t>자문</a:t>
+            </a:r>
+          </a:p>
+        </p:txBody>
+      </p:sp>
+      <p:cxnSp>
+        <p:nvCxnSpPr>
+          <p:cNvPr id="10" name="Connector 9"/>
+          <p:cNvCxnSpPr/>
+          <p:nvPr/>
+        </p:nvCxnSpPr>
+        <p:spPr>
+          <a:xfrm>
+            <a:off x="2232000" y="345600"/>
+            <a:ext cx="0" cy="1166400"/>
+          </a:xfrm>
+          <a:prstGeom prst="line">
+            <a:avLst/>
+          </a:prstGeom>
+          <a:ln w="3600">
+            <a:solidFill>
+              <a:srgbClr val="DCDFE4"/>
+            </a:solidFill>
+          </a:ln>
+        </p:spPr>
+      </p:cxnSp>
+      <p:sp>
+        <p:nvSpPr>
+          <p:cNvPr id="11" name="텍스트"/>
+          <p:cNvSpPr txBox="1"/>
+          <p:nvPr/>
+        </p:nvSpPr>
+        <p:spPr>
+          <a:xfrm>
+            <a:off x="2376000" y="396000"/>
+            <a:ext cx="648000" cy="91441"/>
+          </a:xfrm>
+          <a:prstGeom prst="rect">
+            <a:avLst/>
+          </a:prstGeom>
+          <a:noFill/>
+        </p:spPr>
+        <p:txBody>
+          <a:bodyPr wrap="square" lIns="0" rIns="0" tIns="0" bIns="0" anchor="t">
+            <a:spAutoFit/>
+          </a:bodyPr>
+          <a:lstStyle/>
+          <a:p>
+            <a:pPr algn="l">
+              <a:lnSpc>
+                <a:spcPts val="696"/>
+              </a:lnSpc>
+            </a:pPr>
+            <a:r>
+              <a:rPr sz="480" b="1" spc="140">
+                <a:solidFill>
+                  <a:srgbClr val="6B7280"/>
+                </a:solidFill>
+                <a:latin typeface="맑은 고딕"/>
+                <a:ea typeface="맑은 고딕"/>
+              </a:rPr>
+              <a:t>HOURS</a:t>
+            </a:r>
+          </a:p>
+        </p:txBody>
+      </p:sp>
+      <p:sp>
+        <p:nvSpPr>
+          <p:cNvPr id="12" name="텍스트"/>
+          <p:cNvSpPr txBox="1"/>
+          <p:nvPr/>
+        </p:nvSpPr>
+        <p:spPr>
+          <a:xfrm>
+            <a:off x="2376000" y="511200"/>
+            <a:ext cx="720000" cy="118111"/>
+          </a:xfrm>
+          <a:prstGeom prst="rect">
+            <a:avLst/>
+          </a:prstGeom>
+          <a:noFill/>
+        </p:spPr>
+        <p:txBody>
+          <a:bodyPr wrap="square" lIns="0" rIns="0" tIns="0" bIns="0" anchor="t">
+            <a:spAutoFit/>
+          </a:bodyPr>
+          <a:lstStyle/>
+          <a:p>
+            <a:pPr algn="l">
+              <a:lnSpc>
+                <a:spcPts val="899"/>
+              </a:lnSpc>
+            </a:pPr>
+            <a:r>
+              <a:rPr sz="620" b="0">
+                <a:solidFill>
+                  <a:srgbClr val="12151C"/>
+                </a:solidFill>
+                <a:latin typeface="맑은 고딕"/>
+                <a:ea typeface="맑은 고딕"/>
+              </a:rPr>
+              <a:t>평일 10:00 – 18:00</a:t>
+            </a:r>
+          </a:p>
+        </p:txBody>
+      </p:sp>
+      <p:sp>
+        <p:nvSpPr>
+          <p:cNvPr id="13" name="텍스트"/>
+          <p:cNvSpPr txBox="1"/>
+          <p:nvPr/>
+        </p:nvSpPr>
+        <p:spPr>
+          <a:xfrm>
+            <a:off x="2376000" y="835200"/>
+            <a:ext cx="648000" cy="91441"/>
+          </a:xfrm>
+          <a:prstGeom prst="rect">
+            <a:avLst/>
+          </a:prstGeom>
+          <a:noFill/>
+        </p:spPr>
+        <p:txBody>
+          <a:bodyPr wrap="square" lIns="0" rIns="0" tIns="0" bIns="0" anchor="t">
+            <a:spAutoFit/>
+          </a:bodyPr>
+          <a:lstStyle/>
+          <a:p>
+            <a:pPr algn="l">
+              <a:lnSpc>
+                <a:spcPts val="696"/>
+              </a:lnSpc>
+            </a:pPr>
+            <a:r>
+              <a:rPr sz="480" b="1" spc="140">
+                <a:solidFill>
+                  <a:srgbClr val="6B7280"/>
+                </a:solidFill>
+                <a:latin typeface="맑은 고딕"/>
+                <a:ea typeface="맑은 고딕"/>
+              </a:rPr>
+              <a:t>WEB</a:t>
+            </a:r>
+          </a:p>
+        </p:txBody>
+      </p:sp>
+      <p:sp>
+        <p:nvSpPr>
+          <p:cNvPr id="14" name="텍스트"/>
+          <p:cNvSpPr txBox="1"/>
+          <p:nvPr/>
+        </p:nvSpPr>
+        <p:spPr>
+          <a:xfrm>
+            <a:off x="2376000" y="950400"/>
+            <a:ext cx="684000" cy="118111"/>
+          </a:xfrm>
+          <a:prstGeom prst="rect">
+            <a:avLst/>
+          </a:prstGeom>
+          <a:noFill/>
+        </p:spPr>
+        <p:txBody>
+          <a:bodyPr wrap="square" lIns="0" rIns="0" tIns="0" bIns="0" anchor="t">
+            <a:spAutoFit/>
+          </a:bodyPr>
+          <a:lstStyle/>
+          <a:p>
+            <a:pPr algn="l">
+              <a:lnSpc>
+                <a:spcPts val="899"/>
+              </a:lnSpc>
+            </a:pPr>
+            <a:r>
+              <a:rPr sz="620" b="0">
+                <a:solidFill>
+                  <a:srgbClr val="12151C"/>
+                </a:solidFill>
+                <a:latin typeface="맑은 고딕"/>
+                <a:ea typeface="맑은 고딕"/>
+              </a:rPr>
+              <a:t>www.example.com</a:t>
+            </a:r>
+          </a:p>
+        </p:txBody>
+      </p:sp>
+      <p:sp>
+        <p:nvSpPr>
+          <p:cNvPr id="15" name="Rectangle 14"/>
+          <p:cNvSpPr/>
+          <p:nvPr/>
+        </p:nvSpPr>
+        <p:spPr>
+          <a:xfrm>
+            <a:off x="2376000" y="1224000"/>
+            <a:ext cx="237600" cy="237600"/>
+          </a:xfrm>
+          <a:prstGeom prst="rect">
+            <a:avLst/>
+          </a:prstGeom>
+          <a:noFill/>
+          <a:ln w="4320">
             <a:solidFill>
               <a:srgbClr val="6B7280"/>
             </a:solidFill>
@@ -3604,14 +4110,14 @@
       </p:sp>
       <p:sp>
         <p:nvSpPr>
-          <p:cNvPr id="3" name="텍스트"/>
+          <p:cNvPr id="16" name="텍스트"/>
           <p:cNvSpPr txBox="1"/>
           <p:nvPr/>
         </p:nvSpPr>
         <p:spPr>
           <a:xfrm>
-            <a:off x="2304000" y="504000"/>
-            <a:ext cx="684000" cy="684000"/>
+            <a:off x="2376000" y="1224000"/>
+            <a:ext cx="237600" cy="237600"/>
           </a:xfrm>
           <a:prstGeom prst="rect">
             <a:avLst/>
@@ -3626,11 +4132,11 @@
           <a:p>
             <a:pPr algn="ctr">
               <a:lnSpc>
-                <a:spcPts val="1595"/>
+                <a:spcPts val="725"/>
               </a:lnSpc>
             </a:pPr>
             <a:r>
-              <a:rPr sz="1100" b="1">
+              <a:rPr sz="500" b="1">
                 <a:solidFill>
                   <a:srgbClr val="6B7280"/>
                 </a:solidFill>
@@ -3638,132 +4144,6 @@
                 <a:ea typeface="맑은 고딕"/>
               </a:rPr>
               <a:t>QR</a:t>
-            </a:r>
-          </a:p>
-        </p:txBody>
-      </p:sp>
-      <p:sp>
-        <p:nvSpPr>
-          <p:cNvPr id="4" name="텍스트"/>
-          <p:cNvSpPr txBox="1"/>
-          <p:nvPr/>
-        </p:nvSpPr>
-        <p:spPr>
-          <a:xfrm>
-            <a:off x="252000" y="504000"/>
-            <a:ext cx="1728000" cy="720000"/>
-          </a:xfrm>
-          <a:prstGeom prst="rect">
-            <a:avLst/>
-          </a:prstGeom>
-          <a:noFill/>
-        </p:spPr>
-        <p:txBody>
-          <a:bodyPr wrap="square" lIns="0" rIns="0" tIns="0" bIns="0" anchor="t">
-            <a:spAutoFit/>
-          </a:bodyPr>
-          <a:lstStyle/>
-          <a:p>
-            <a:pPr algn="l">
-              <a:lnSpc>
-                <a:spcPts val="1739"/>
-              </a:lnSpc>
-            </a:pPr>
-            <a:r>
-              <a:rPr sz="1200" b="1">
-                <a:solidFill>
-                  <a:srgbClr val="12151C"/>
-                </a:solidFill>
-                <a:latin typeface="맑은 고딕"/>
-                <a:ea typeface="맑은 고딕"/>
-              </a:rPr>
-              <a:t>기록하고 공유하고</a:t>
-            </a:r>
-          </a:p>
-          <a:p>
-            <a:pPr algn="l">
-              <a:lnSpc>
-                <a:spcPts val="1739"/>
-              </a:lnSpc>
-            </a:pPr>
-            <a:r>
-              <a:rPr sz="1200" b="1">
-                <a:solidFill>
-                  <a:srgbClr val="12151C"/>
-                </a:solidFill>
-                <a:latin typeface="맑은 고딕"/>
-                <a:ea typeface="맑은 고딕"/>
-              </a:rPr>
-              <a:t>성장합니다</a:t>
-            </a:r>
-          </a:p>
-        </p:txBody>
-      </p:sp>
-      <p:sp>
-        <p:nvSpPr>
-          <p:cNvPr id="5" name="Rectangle 4"/>
-          <p:cNvSpPr/>
-          <p:nvPr/>
-        </p:nvSpPr>
-        <p:spPr>
-          <a:xfrm>
-            <a:off x="252000" y="1296000"/>
-            <a:ext cx="144000" cy="18000"/>
-          </a:xfrm>
-          <a:prstGeom prst="rect">
-            <a:avLst/>
-          </a:prstGeom>
-          <a:solidFill>
-            <a:srgbClr val="00C2C0"/>
-          </a:solidFill>
-          <a:ln>
-            <a:noFill/>
-          </a:ln>
-        </p:spPr>
-        <p:txBody>
-          <a:bodyPr rtlCol="0" anchor="ctr"/>
-          <a:lstStyle/>
-          <a:p>
-            <a:pPr algn="ctr"/>
-          </a:p>
-        </p:txBody>
-      </p:sp>
-      <p:sp>
-        <p:nvSpPr>
-          <p:cNvPr id="6" name="텍스트"/>
-          <p:cNvSpPr txBox="1"/>
-          <p:nvPr/>
-        </p:nvSpPr>
-        <p:spPr>
-          <a:xfrm>
-            <a:off x="252000" y="1404000"/>
-            <a:ext cx="1656000" cy="133351"/>
-          </a:xfrm>
-          <a:prstGeom prst="rect">
-            <a:avLst/>
-          </a:prstGeom>
-          <a:noFill/>
-        </p:spPr>
-        <p:txBody>
-          <a:bodyPr wrap="square" lIns="0" rIns="0" tIns="0" bIns="0" anchor="t">
-            <a:spAutoFit/>
-          </a:bodyPr>
-          <a:lstStyle/>
-          <a:p>
-            <a:pPr algn="l">
-              <a:lnSpc>
-                <a:spcPts val="1015"/>
-              </a:lnSpc>
-            </a:pPr>
-            <a:r>
-              <a:rPr sz="700" b="1" spc="200">
-                <a:solidFill>
-                  <a:srgbClr val="6B7280"/>
-                </a:solidFill>
-                <a:latin typeface="맑은 고딕"/>
-                <a:ea typeface="맑은 고딕"/>
-              </a:rPr>
-              <a:t>소속 · 브랜드</a:t>
             </a:r>
           </a:p>
         </p:txBody>
